--- a/presentation/modernizing-201-fastapi/Modernizing-201-FastAPI-r1.1.pptx
+++ b/presentation/modernizing-201-fastapi/Modernizing-201-FastAPI-r1.1.pptx
@@ -720,7 +720,7 @@
           <a:p>
             <a:r>
               <a:rPr lang="en-US" dirty="0"/>
-              <a:t>FastAPI validates OrderCreate automatically on every POST: a missing field, a quantity below Field(ge=1), or an empty items list never reaches a handler function at all; it comes back as a 422 with a field-level error before any business logic runs. The alias pattern is the wire-contract trick worth lingering on: Python fields stay snake_case for every tool that cares about PEP 8, while the JSON on the wire is camelCase, because the field population reads customerId off the request body but the Python code everywhere else just writes order.customer_id. order_view_to_out is called out as the one function that bridges the read model's column name, order_id, onto the API's frozen field name, id; routes never construct OrderOut by hand, specifically so that bridge only exists in one place. There is no shared schema module across services: each one hand-authors its own structurally identical copy of a consumed event's shape, which is the real cost of a JSON contract with no schema registry (that gap is exactly what section C's registry envelope slide closes, for the one demo that opts into it).</a:t>
+              <a:t>FastAPI validates OrderCreate automatically on every POST: a missing field, a quantity below Field(ge=1), or an empty items list never reaches a handler function at all; it comes back as a 422 with a field-level error before any business logic runs. The alias pattern is the wire-contract trick worth lingering on: Python fields stay snake_case for every tool that cares about PEP 8, while the JSON on the wire is camelCase, because the field population reads customerId off the request body but the Python code everywhere else just writes order.customer_id. order_view_to_out is called out as the one function that bridges the read model's column name, order_id, onto the API's frozen field name, id; routes never construct OrderOut by hand, specifically so that bridge only exists in one place. There is no shared schema module across services: each one hand-authors its own structurally identical copy of a consumed event's shape, which is the real cost of a JSON contract with no schema registry, the gap an Avro/registry wire envelope closes for the one demo that opts into it.</a:t>
             </a:r>
             <a:endParaRPr lang="en-US" dirty="0"/>
           </a:p>
@@ -2128,7 +2128,7 @@
           <a:p>
             <a:r>
               <a:rPr lang="en-US" dirty="0"/>
-              <a:t>The chassis here is a code-presence question, not a dependency question: config as a frozen dataclass plus from_env(), stdlib RotatingFileHandler logging to a per-service log file, and a GET /health route are each copied into service after service rather than imported from one shared package. monolith_base_url is worth a beat: it's a documented, operator-only fallback, kept and logged at startup but never read by the actual enrich() call path: an operator can point ORDER_BASE_URL itself at the frozen monolith during an incident without a code change, but nothing in this service fails over to it automatically. That's the right amount of safety net for a decommission window: present, named, and never silently engaged. Chapter 27's own scorecard counts this precisely: config is used on 7 of 8 services (review-service predates the convention), logging on all 8, and a Containerfile on all 8, numbers worth having on hand before the scorecard diagram two slides from now.</a:t>
+              <a:t>The chassis here is a code-presence question, not a dependency question: config as a frozen dataclass plus from_env(), stdlib RotatingFileHandler logging to a per-service log file, and a GET /health route are each copied into service after service rather than imported from one shared package. monolith_base_url is worth a beat: it's a documented, operator-only fallback, kept and logged at startup but never read by the actual enrich() call path: an operator can point ORDER_BASE_URL itself at the frozen monolith during an incident without a code change, but nothing in this service fails over to it automatically. That's the right amount of safety net for a decommission window: present, named, and never silently engaged. The chassis scorecard counts this precisely: config is used on 7 of 8 services (review-service predates the convention), logging on all 8, and a Containerfile on all 8.</a:t>
             </a:r>
             <a:endParaRPr lang="en-US" dirty="0"/>
           </a:p>
@@ -2392,7 +2392,7 @@
           <a:p>
             <a:r>
               <a:rPr lang="en-US" dirty="0"/>
-              <a:t>Four resilience mechanisms already existed before anyone called them that: a bounded gRPC deadline on the inventory client since the reservation call was first written, the outbox's at-least-once delivery guarantee, the conditional-UPDATE idempotent dedupe on saga reactions, and the saga orchestrator's own crash-resume durability (section E's closing example). Tenacity's retry is the one new piece this system adds on top. A circuit breaker and a bulkhead are named and explicitly not built: a circuit breaker buys a state machine that stops calling a dependency that has demonstrated it won't succeed, instead of retrying it on every call forever, and that's real value, but nothing in this system's own traffic has yet produced the sustained failure rate that would justify the added complexity. The framing to land: resilience mechanisms here were each built to solve a correctness problem a specific extraction already had, not added speculatively because a catalog says a distributed system should have them; the day a circuit breaker is justified, it's a decorator at one call site, not a redesign.</a:t>
+              <a:t>Four resilience mechanisms already existed before anyone called them that: a bounded gRPC deadline on the inventory client since the reservation call was first written, the outbox's at-least-once delivery guarantee, the conditional-UPDATE idempotent dedupe on saga reactions, and the saga orchestrator's own crash-resume durability. Tenacity's retry is the one new piece this system adds on top. A circuit breaker and a bulkhead are named and explicitly not built: a circuit breaker buys a state machine that stops calling a dependency that has demonstrated it won't succeed, instead of retrying it on every call forever, and that's real value, but nothing in this system's own traffic has yet produced the sustained failure rate that would justify the added complexity. The framing to land: resilience mechanisms here were each built to solve a correctness problem a specific extraction already had, not added speculatively because a catalog says a distributed system should have them; the day a circuit breaker is justified, it's a decorator at one call site, not a redesign.</a:t>
             </a:r>
             <a:endParaRPr lang="en-US" dirty="0"/>
           </a:p>
@@ -2568,7 +2568,7 @@
           <a:p>
             <a:r>
               <a:rPr lang="en-US" dirty="0"/>
-              <a:t>OTel in this project is zero-code only: opentelemetry-distro plus the exact set of opentelemetry-instrumentation-* packages opentelemetry-bootstrap resolves for each service's own dependencies, pinned in pyproject.toml, with the Containerfile's entrypoint wrapped as opentelemetry-instrument uvicorn app.main:app. There is no hand-authored tracer.start_as_current_span anywhere in this codebase; every span in the hero trace comes from an auto-instrumentor, not an application developer reaching for the OTel API directly. The hero trace traces one synchronous path end to end (the client through strangler-proxy, strangler-proxy's httpx call to order-service, and order-service's grpc.aio call to inventory-service's Reserve), chosen specifically because it's the one connected request/response chain in the system; the four Kafka saga hops stay mesh-only because propagating trace context through an outbox row and restoring it in the relay is real additional work this chapter named and didn't take on. Name the version-skew caveat precisely: opentelemetry-instrumentation-sqlalchemy's own dependency metadata caps its support at sqlalchemy&lt;2.1.0, and order-service and inventory-service both pin sqlalchemy[asyncio]==2.1.4, kept at that version because this project upgrades the tool rather than downgrading the pin when the two disagree. The SQLAlchemy instrumentor loads, finds no version it recognizes, and declines to patch: one warning line at startup, no crash. opentelemetry-instrumentation-asyncpg carries no such cap and instruments the real driver underneath SQLAlchemy's async engine, so every database span in the hero trace names the raw SQL asyncpg executed, with none of SQLAlchemy's own ORM-level attributes attached; the database work is fully visible, described at the driver's level rather than the ORM's.</a:t>
+              <a:t>OTel in this project is zero-code only: opentelemetry-distro plus the exact set of opentelemetry-instrumentation-* packages opentelemetry-bootstrap resolves for each service's own dependencies, pinned in pyproject.toml, with the Containerfile's entrypoint wrapped as opentelemetry-instrument uvicorn app.main:app. There is no hand-authored tracer.start_as_current_span anywhere in this codebase; every span in the hero trace comes from an auto-instrumentor, not an application developer reaching for the OTel API directly. The hero trace traces one synchronous path end to end (the client through strangler-proxy, strangler-proxy's httpx call to order-service, and order-service's grpc.aio call to inventory-service's Reserve), chosen specifically because it's the one connected request/response chain in the system; the four Kafka saga hops stay mesh-only because propagating trace context through an outbox row and restoring it in the relay is real additional work that's named here and wasn't taken on. Name the version-skew caveat precisely: opentelemetry-instrumentation-sqlalchemy's own dependency metadata caps its support at sqlalchemy&lt;2.1.0, and order-service and inventory-service both pin sqlalchemy[asyncio]==2.1.4, kept at that version because this project upgrades the tool rather than downgrading the pin when the two disagree. The SQLAlchemy instrumentor loads, finds no version it recognizes, and declines to patch: one warning line at startup, no crash. opentelemetry-instrumentation-asyncpg carries no such cap and instruments the real driver underneath SQLAlchemy's async engine, so every database span in the hero trace names the raw SQL asyncpg executed, with none of SQLAlchemy's own ORM-level attributes attached; the database work is fully visible, described at the driver's level rather than the ORM's.</a:t>
             </a:r>
             <a:endParaRPr lang="en-US" dirty="0"/>
           </a:p>
@@ -2656,7 +2656,7 @@
           <a:p>
             <a:r>
               <a:rPr lang="en-US" dirty="0"/>
-              <a:t>Three bands, real counts: USED on every service: config via from_env() on 7 of 8 (review-service predates the convention), stdlib logging on 8 of 8, a Containerfile on 8 of 8. PARTIAL, with a named reason per gap: GET /health on 6 of 8 (absent from the proxy and review-service), the uniform errors.py mapping on 6 of 8 (absent from the proxy and the GraphQL gateway, each for a structural reason), tenacity on exactly 1 of 8. DEFERRED, with zero footprint before this chapter: OpenTelemetry (now on 3 of 8, the previous slide's three services), a circuit breaker or bulkhead (named in planning prose, no code anywhere), and a true shared chassis library (every file here is copied and hand-adapted per service, never imported from one shared package). The closing point for the whole section: a scorecard with real per-service counts is worth more than a claim that the chassis is complete, because it tells a reader exactly what to expect from the ninth service someone builds next.</a:t>
+              <a:t>Three bands, real counts: USED on every service: config via from_env() on 7 of 8 (review-service predates the convention), stdlib logging on 8 of 8, a Containerfile on 8 of 8. PARTIAL, with a named reason per gap: GET /health on 6 of 8 (absent from the proxy and review-service), the uniform errors.py mapping on 6 of 8 (absent from the proxy and the GraphQL gateway, each for a structural reason), tenacity on exactly 1 of 8. DEFERRED, with zero footprint before now: OpenTelemetry (on 3 of 8 services), a circuit breaker or bulkhead (named in planning prose, no code anywhere), and a true shared chassis library (every file here is copied and hand-adapted per service, never imported from one shared package). The closing point: a scorecard with real per-service counts is worth more than a claim that the chassis is complete, because it tells a reader exactly what to expect from the ninth service someone builds next.</a:t>
             </a:r>
             <a:endParaRPr lang="en-US" dirty="0"/>
           </a:p>
@@ -2744,7 +2744,7 @@
           <a:p>
             <a:r>
               <a:rPr lang="en-US" dirty="0"/>
-              <a:t>Traces one checkout through five diagrams already introduced individually, now stitched together as one continuous story: the orchestrated shipping saga, the choreographed payment saga, the async CQRS write/read split, a crash mid-saga and its resume, and the simplest path (notification) as the closer. No new code in this section: it's where everything from sections A through D gets pointed back to as pieces of one request.</a:t>
+              <a:t>Traces one checkout through five diagrams already introduced individually, now stitched together as one continuous story: the orchestrated shipping saga, the choreographed payment saga, the async CQRS write/read split, a crash mid-saga and its resume, and the simplest path (notification) as the closer. No new code here: it's where the async foundation, Pydantic validation, messaging, and the chassis all get pointed back to as pieces of one request.</a:t>
             </a:r>
             <a:endParaRPr lang="en-US" dirty="0"/>
           </a:p>
@@ -2920,7 +2920,7 @@
           <a:p>
             <a:r>
               <a:rPr lang="en-US" dirty="0"/>
-              <a:t>Payment-service has no orchestrator at all: it just reacts. The order.placed consumer from section C fires process_order_placed, which runs a deterministic DECLINE rule (lifted byte for byte from the monolith's own charge logic) and always produces a Payment row and an outcome event, capture or decline, never an exception. That's the structural contrast with the orchestrated path on the previous slide: shipping-service's saga is a state machine that knows about all four of its own steps and their compensations; payment-service only knows how to answer one event, publish one outcome, and let whoever's downstream (shipping-service, order-service's own saga reactions) decide what that outcome means for them. Same checkout, same Kafka topic as the trigger, two different coordination shapes.</a:t>
+              <a:t>Payment-service has no orchestrator at all: it just reacts. The order.placed consumer fires process_order_placed, which runs a deterministic DECLINE rule (lifted byte for byte from the monolith's own charge logic) and always produces a Payment row and an outcome event, capture or decline, never an exception. That's the structural contrast with the orchestrated path on the previous slide: shipping-service's saga is a state machine that knows about all four of its own steps and their compensations; payment-service only knows how to answer one event, publish one outcome, and let whoever's downstream (shipping-service, order-service's own saga reactions) decide what that outcome means for them. Same checkout, same Kafka topic as the trigger, two different coordination shapes.</a:t>
             </a:r>
             <a:endParaRPr lang="en-US" dirty="0"/>
           </a:p>
@@ -3008,7 +3008,7 @@
           <a:p>
             <a:r>
               <a:rPr lang="en-US" dirty="0"/>
-              <a:t>Order-service's five tables split cleanly into two families: the write aggregate (orders, order_items, customers, the outbox) and the one read table, order_view, that every GET handler queries exclusively: app/routes.py never imports Order or OrderItem at all. Every write function that touches the aggregate also upserts order_view in the same transaction, which is the unit-of-work slide from section A paying off here specifically: a reader can never observe an order whose view hasn't caught up, because there's no commit where one exists without the other. rebuild_order_view exists as an explicit escape hatch: the projection is rebuildable from current aggregate state at any time, never a second source of truth that could drift from the write side and need reconciling.</a:t>
+              <a:t>Order-service's five tables split cleanly into two families: the write aggregate (orders, order_items, customers, the outbox) and the one read table, order_view, that every GET handler queries exclusively: app/routes.py never imports Order or OrderItem at all. Every write function that touches the aggregate also upserts order_view in the same transaction, which is the unit-of-work pattern paying off here specifically: a reader can never observe an order whose view hasn't caught up, because there's no commit where one exists without the other. rebuild_order_view exists as an explicit escape hatch: the projection is rebuildable from current aggregate state at any time, never a second source of truth that could drift from the write side and need reconciling.</a:t>
             </a:r>
             <a:endParaRPr lang="en-US" dirty="0"/>
           </a:p>
@@ -3096,7 +3096,7 @@
           <a:p>
             <a:r>
               <a:rPr lang="en-US" dirty="0"/>
-              <a:t>This is the proof, not just the claim: the integration test seeds a Saga row directly with status=RUNNING, step_index=1, and a context already carrying step 0's output: exactly the row a real process would leave behind if it died right after committing enrich but before attempting dispatch. resume_running_sagas(), the same call the app's lifespan makes on every startup, is invoked, and the test monkeypatches fetch_shipping_address to raise if it's ever called again, proving step 0 is not re-run, because step_index=1 says it already completed. The saga then reaches COMPLETED, with exactly one shipment.dispatched outbox row, proving steps 2 through 4 do run and pick up exactly where the simulated crash left off. Tie this back to section A's unit-of-work and section C's at-least-once relay: durability here is those two ideas combined, persisted step state plus a relay that always eventually publishes what got committed.</a:t>
+              <a:t>This is the proof, not just the claim: the integration test seeds a Saga row directly with status=RUNNING, step_index=1, and a context already carrying step 0's output: exactly the row a real process would leave behind if it died right after committing enrich but before attempting dispatch. resume_running_sagas(), the same call the app's lifespan makes on every startup, is invoked, and the test monkeypatches fetch_shipping_address to raise if it's ever called again, proving step 0 is not re-run, because step_index=1 says it already completed. The saga then reaches COMPLETED, with exactly one shipment.dispatched outbox row, proving steps 2 through 4 do run and pick up exactly where the simulated crash left off. Durability here combines two ideas: the unit-of-work commit and the at-least-once relay, persisted step state plus a relay that always eventually publishes what got committed.</a:t>
             </a:r>
             <a:endParaRPr lang="en-US" dirty="0"/>
           </a:p>
@@ -3184,7 +3184,7 @@
           <a:p>
             <a:r>
               <a:rPr lang="en-US" dirty="0"/>
-              <a:t>Notification-service is the simplest consumer in the whole system: it only ever consumes order.placed, it never produces an event of its own, and it has no outbox to maintain. That asymmetry makes it the right closer, because it shows the pattern set scales down as cleanly as it scales up: not every service needs a relay, a saga, or a CQRS split; a pure reactor just needs the same idempotent-consumer discipline from section C's dedupe slide and nothing more. Closing the Together section here, on the lowest-complexity path, is a reminder that the deep mechanics in sections A through D are there when a service's job calls for them, not a tax every service pays regardless of what it actually does.</a:t>
+              <a:t>Notification-service is the simplest consumer in the whole system: it only ever consumes order.placed, it never produces an event of its own, and it has no outbox to maintain. That asymmetry makes it the right closer, because it shows the pattern set scales down as cleanly as it scales up: not every service needs a relay, a saga, or a CQRS split; a pure reactor just needs the same idempotent-consumer discipline and nothing more. Closing on the lowest-complexity path is a reminder that the deeper mechanics are there when a service's job calls for them, not a tax every service pays regardless of what it actually does.</a:t>
             </a:r>
             <a:endParaRPr lang="en-US" dirty="0"/>
           </a:p>
@@ -3360,7 +3360,7 @@
           <a:p>
             <a:r>
               <a:rPr lang="en-US" dirty="0"/>
-              <a:t>Two-stage build: a builder stage that resolves dependencies before the app code is copied in, so a code change never invalidates the dependency-install cache layer, and a slim runtime stage that copies only the finished /app tree out of it. UBI10 publishes only a -minimal Python 3.14 image, which has no shadow-utils for useradd: so instead of creating a user, the Containerfile fixes group ownership on /app and runs as UID 1001 with GID 0, the same arbitrary-UID-compatible pattern every container in this project uses, OpenShift-ready without any OpenShift-specific flag. The CMD line is where the OTel wrapper from the previous section actually lands: opentelemetry-instrument wraps only the uvicorn process, after alembic upgrade head has already run, so the migration step itself produces no span. OTEL_SDK_DISABLED=true by default means this wrapper is a true no-op everywhere outside a cluster whose config has turned it on explicitly.</a:t>
+              <a:t>Two-stage build: a builder stage that resolves dependencies before the app code is copied in, so a code change never invalidates the dependency-install cache layer, and a slim runtime stage that copies only the finished /app tree out of it. UBI10 publishes only a -minimal Python 3.14 image, which has no shadow-utils for useradd: so instead of creating a user, the Containerfile fixes group ownership on /app and runs as UID 1001 with GID 0, the same arbitrary-UID-compatible pattern every container in this project uses, OpenShift-ready without any OpenShift-specific flag. The CMD line is where the OTel wrapper actually lands: opentelemetry-instrument wraps only the uvicorn process, after alembic upgrade head has already run, so the migration step itself produces no span. OTEL_SDK_DISABLED=true by default means this wrapper is a true no-op everywhere outside a cluster whose config has turned it on explicitly.</a:t>
             </a:r>
             <a:endParaRPr lang="en-US" dirty="0"/>
           </a:p>
@@ -4152,7 +4152,7 @@
           <a:p>
             <a:r>
               <a:rPr lang="en-US" dirty="0"/>
-              <a:t>The relay is a separate background loop, polling the same outbox table the previous slide committed to, publishing each unpublished row to Kafka, then stamping published_at in its own short transaction. The crash window is specific and named, not hand-waved: if the process dies after the Kafka publish succeeds but before the published_at stamp commits, the next poll sees the row as still unpublished and sends it again. That is a deliberate at-least-once contract, not a bug; the alternative (stamp first, publish second) would risk losing the event entirely on the same crash, which is strictly worse for an order-placed notification than a duplicate. This is the hinge slide for the whole deck: every consumer you'll see in section C has to assume redelivery is possible, and every one of them is built to cope with it.</a:t>
+              <a:t>The relay is a separate background loop, polling the same outbox table the previous slide committed to, publishing each unpublished row to Kafka, then stamping published_at in its own short transaction. The crash window is specific and named, not hand-waved: if the process dies after the Kafka publish succeeds but before the published_at stamp commits, the next poll sees the row as still unpublished and sends it again. That is a deliberate at-least-once contract, not a bug; the alternative (stamp first, publish second) would risk losing the event entirely on the same crash, which is strictly worse for an order-placed notification than a duplicate. This is the hinge slide for the whole deck: every idempotent consumer in this system has to assume redelivery is possible, and every one of them is built to cope with it.</a:t>
             </a:r>
             <a:endParaRPr lang="en-US" dirty="0"/>
           </a:p>
@@ -4666,9 +4666,9 @@
                 <a:solidFill>
                   <a:srgbClr val="EE0000"/>
                 </a:solidFill>
-                <a:latin typeface="Overpass" pitchFamily="34" charset="0"/>
-                <a:ea typeface="Overpass" pitchFamily="34" charset="-122"/>
-                <a:cs typeface="Overpass" pitchFamily="34" charset="-120"/>
+                <a:latin typeface="Red Hat Display" pitchFamily="34" charset="0"/>
+                <a:ea typeface="Red Hat Display" pitchFamily="34" charset="-122"/>
+                <a:cs typeface="Red Hat Display" pitchFamily="34" charset="-120"/>
               </a:rPr>
               <a:t>MODERNIZING ENTERPRISE APPLICATIONS (PYTHON) · 201-FASTAPI</a:t>
             </a:r>
@@ -4705,9 +4705,9 @@
                 <a:solidFill>
                   <a:srgbClr val="151515"/>
                 </a:solidFill>
-                <a:latin typeface="Overpass" pitchFamily="34" charset="0"/>
-                <a:ea typeface="Overpass" pitchFamily="34" charset="-122"/>
-                <a:cs typeface="Overpass" pitchFamily="34" charset="-120"/>
+                <a:latin typeface="Red Hat Display" pitchFamily="34" charset="0"/>
+                <a:ea typeface="Red Hat Display" pitchFamily="34" charset="-122"/>
+                <a:cs typeface="Red Hat Display" pitchFamily="34" charset="-120"/>
               </a:rPr>
               <a:t>The async</a:t>
             </a:r>
@@ -4722,9 +4722,9 @@
                 <a:solidFill>
                   <a:srgbClr val="151515"/>
                 </a:solidFill>
-                <a:latin typeface="Overpass" pitchFamily="34" charset="0"/>
-                <a:ea typeface="Overpass" pitchFamily="34" charset="-122"/>
-                <a:cs typeface="Overpass" pitchFamily="34" charset="-120"/>
+                <a:latin typeface="Red Hat Display" pitchFamily="34" charset="0"/>
+                <a:ea typeface="Red Hat Display" pitchFamily="34" charset="-122"/>
+                <a:cs typeface="Red Hat Display" pitchFamily="34" charset="-120"/>
               </a:rPr>
               <a:t>deep dive</a:t>
             </a:r>
@@ -4951,9 +4951,9 @@
                 <a:solidFill>
                   <a:srgbClr val="EE0000"/>
                 </a:solidFill>
-                <a:latin typeface="Overpass" pitchFamily="34" charset="0"/>
-                <a:ea typeface="Overpass" pitchFamily="34" charset="-122"/>
-                <a:cs typeface="Overpass" pitchFamily="34" charset="-120"/>
+                <a:latin typeface="Red Hat Display" pitchFamily="34" charset="0"/>
+                <a:ea typeface="Red Hat Display" pitchFamily="34" charset="-122"/>
+                <a:cs typeface="Red Hat Display" pitchFamily="34" charset="-120"/>
               </a:rPr>
               <a:t>PYDANTIC V2 · SETTINGS, AND WHERE IT ISN'T PYDANTIC</a:t>
             </a:r>
@@ -4990,9 +4990,9 @@
                 <a:solidFill>
                   <a:srgbClr val="151515"/>
                 </a:solidFill>
-                <a:latin typeface="Overpass" pitchFamily="34" charset="0"/>
-                <a:ea typeface="Overpass" pitchFamily="34" charset="-122"/>
-                <a:cs typeface="Overpass" pitchFamily="34" charset="-120"/>
+                <a:latin typeface="Red Hat Display" pitchFamily="34" charset="0"/>
+                <a:ea typeface="Red Hat Display" pitchFamily="34" charset="-122"/>
+                <a:cs typeface="Red Hat Display" pitchFamily="34" charset="-120"/>
               </a:rPr>
               <a:t>A frozen dataclass, read from the environment at call time</a:t>
             </a:r>
@@ -5569,9 +5569,9 @@
                 <a:solidFill>
                   <a:srgbClr val="EE0000"/>
                 </a:solidFill>
-                <a:latin typeface="Overpass" pitchFamily="34" charset="0"/>
-                <a:ea typeface="Overpass" pitchFamily="34" charset="-122"/>
-                <a:cs typeface="Overpass" pitchFamily="34" charset="-120"/>
+                <a:latin typeface="Red Hat Display" pitchFamily="34" charset="0"/>
+                <a:ea typeface="Red Hat Display" pitchFamily="34" charset="-122"/>
+                <a:cs typeface="Red Hat Display" pitchFamily="34" charset="-120"/>
               </a:rPr>
               <a:t>PYDANTIC V2 · REQUEST/RESPONSE MODELS</a:t>
             </a:r>
@@ -5608,9 +5608,9 @@
                 <a:solidFill>
                   <a:srgbClr val="151515"/>
                 </a:solidFill>
-                <a:latin typeface="Overpass" pitchFamily="34" charset="0"/>
-                <a:ea typeface="Overpass" pitchFamily="34" charset="-122"/>
-                <a:cs typeface="Overpass" pitchFamily="34" charset="-120"/>
+                <a:latin typeface="Red Hat Display" pitchFamily="34" charset="0"/>
+                <a:ea typeface="Red Hat Display" pitchFamily="34" charset="-122"/>
+                <a:cs typeface="Red Hat Display" pitchFamily="34" charset="-120"/>
               </a:rPr>
               <a:t>Validation at the edge, not scattered through the service</a:t>
             </a:r>
@@ -6187,9 +6187,9 @@
                 <a:solidFill>
                   <a:srgbClr val="EE0000"/>
                 </a:solidFill>
-                <a:latin typeface="Overpass" pitchFamily="34" charset="0"/>
-                <a:ea typeface="Overpass" pitchFamily="34" charset="-122"/>
-                <a:cs typeface="Overpass" pitchFamily="34" charset="-120"/>
+                <a:latin typeface="Red Hat Display" pitchFamily="34" charset="0"/>
+                <a:ea typeface="Red Hat Display" pitchFamily="34" charset="-122"/>
+                <a:cs typeface="Red Hat Display" pitchFamily="34" charset="-120"/>
               </a:rPr>
               <a:t>PYDANTIC V2 · ACL TRANSLATION</a:t>
             </a:r>
@@ -6226,9 +6226,9 @@
                 <a:solidFill>
                   <a:srgbClr val="151515"/>
                 </a:solidFill>
-                <a:latin typeface="Overpass" pitchFamily="34" charset="0"/>
-                <a:ea typeface="Overpass" pitchFamily="34" charset="-122"/>
-                <a:cs typeface="Overpass" pitchFamily="34" charset="-120"/>
+                <a:latin typeface="Red Hat Display" pitchFamily="34" charset="0"/>
+                <a:ea typeface="Red Hat Display" pitchFamily="34" charset="-122"/>
+                <a:cs typeface="Red Hat Display" pitchFamily="34" charset="-120"/>
               </a:rPr>
               <a:t>Translate at the boundary, not throughout the service</a:t>
             </a:r>
@@ -6415,9 +6415,9 @@
                 <a:solidFill>
                   <a:srgbClr val="EE0000"/>
                 </a:solidFill>
-                <a:latin typeface="Overpass" pitchFamily="34" charset="0"/>
-                <a:ea typeface="Overpass" pitchFamily="34" charset="-122"/>
-                <a:cs typeface="Overpass" pitchFamily="34" charset="-120"/>
+                <a:latin typeface="Red Hat Display" pitchFamily="34" charset="0"/>
+                <a:ea typeface="Red Hat Display" pitchFamily="34" charset="-122"/>
+                <a:cs typeface="Red Hat Display" pitchFamily="34" charset="-120"/>
               </a:rPr>
               <a:t>PYDANTIC V2 · THE GRAPHQL EDGE</a:t>
             </a:r>
@@ -6454,9 +6454,9 @@
                 <a:solidFill>
                   <a:srgbClr val="151515"/>
                 </a:solidFill>
-                <a:latin typeface="Overpass" pitchFamily="34" charset="0"/>
-                <a:ea typeface="Overpass" pitchFamily="34" charset="-122"/>
-                <a:cs typeface="Overpass" pitchFamily="34" charset="-120"/>
+                <a:latin typeface="Red Hat Display" pitchFamily="34" charset="0"/>
+                <a:ea typeface="Red Hat Display" pitchFamily="34" charset="-122"/>
+                <a:cs typeface="Red Hat Display" pitchFamily="34" charset="-120"/>
               </a:rPr>
               <a:t>Strawberry types are the edge's own validated shape</a:t>
             </a:r>
@@ -7087,9 +7087,9 @@
                 <a:solidFill>
                   <a:srgbClr val="EE0000"/>
                 </a:solidFill>
-                <a:latin typeface="Overpass" pitchFamily="34" charset="0"/>
-                <a:ea typeface="Overpass" pitchFamily="34" charset="-122"/>
-                <a:cs typeface="Overpass" pitchFamily="34" charset="-120"/>
+                <a:latin typeface="Red Hat Display" pitchFamily="34" charset="0"/>
+                <a:ea typeface="Red Hat Display" pitchFamily="34" charset="-122"/>
+                <a:cs typeface="Red Hat Display" pitchFamily="34" charset="-120"/>
               </a:rPr>
               <a:t>PYDANTIC V2 · THE GRAPHQL FAN-OUT</a:t>
             </a:r>
@@ -7126,9 +7126,9 @@
                 <a:solidFill>
                   <a:srgbClr val="151515"/>
                 </a:solidFill>
-                <a:latin typeface="Overpass" pitchFamily="34" charset="0"/>
-                <a:ea typeface="Overpass" pitchFamily="34" charset="-122"/>
-                <a:cs typeface="Overpass" pitchFamily="34" charset="-120"/>
+                <a:latin typeface="Red Hat Display" pitchFamily="34" charset="0"/>
+                <a:ea typeface="Red Hat Display" pitchFamily="34" charset="-122"/>
+                <a:cs typeface="Red Hat Display" pitchFamily="34" charset="-120"/>
               </a:rPr>
               <a:t>One validated query, five sources underneath</a:t>
             </a:r>
@@ -7315,9 +7315,9 @@
                 <a:solidFill>
                   <a:srgbClr val="EE0000"/>
                 </a:solidFill>
-                <a:latin typeface="Overpass" pitchFamily="34" charset="0"/>
-                <a:ea typeface="Overpass" pitchFamily="34" charset="-122"/>
-                <a:cs typeface="Overpass" pitchFamily="34" charset="-120"/>
+                <a:latin typeface="Red Hat Display" pitchFamily="34" charset="0"/>
+                <a:ea typeface="Red Hat Display" pitchFamily="34" charset="-122"/>
+                <a:cs typeface="Red Hat Display" pitchFamily="34" charset="-120"/>
               </a:rPr>
               <a:t>PYDANTIC V2 · SYNC TO ASYNC</a:t>
             </a:r>
@@ -7354,9 +7354,9 @@
                 <a:solidFill>
                   <a:srgbClr val="151515"/>
                 </a:solidFill>
-                <a:latin typeface="Overpass" pitchFamily="34" charset="0"/>
-                <a:ea typeface="Overpass" pitchFamily="34" charset="-122"/>
-                <a:cs typeface="Overpass" pitchFamily="34" charset="-120"/>
+                <a:latin typeface="Red Hat Display" pitchFamily="34" charset="0"/>
+                <a:ea typeface="Red Hat Display" pitchFamily="34" charset="-122"/>
+                <a:cs typeface="Red Hat Display" pitchFamily="34" charset="-120"/>
               </a:rPr>
               <a:t>The checkout call crosses from a sync request to an async event</a:t>
             </a:r>
@@ -7511,9 +7511,9 @@
                 <a:solidFill>
                   <a:srgbClr val="FFFFFF"/>
                 </a:solidFill>
-                <a:latin typeface="Overpass" pitchFamily="34" charset="0"/>
-                <a:ea typeface="Overpass" pitchFamily="34" charset="-122"/>
-                <a:cs typeface="Overpass" pitchFamily="34" charset="-120"/>
+                <a:latin typeface="Red Hat Display" pitchFamily="34" charset="0"/>
+                <a:ea typeface="Red Hat Display" pitchFamily="34" charset="-122"/>
+                <a:cs typeface="Red Hat Display" pitchFamily="34" charset="-120"/>
               </a:rPr>
               <a:t>C</a:t>
             </a:r>
@@ -7550,9 +7550,9 @@
                 <a:solidFill>
                   <a:srgbClr val="FFFFFF"/>
                 </a:solidFill>
-                <a:latin typeface="Overpass" pitchFamily="34" charset="0"/>
-                <a:ea typeface="Overpass" pitchFamily="34" charset="-122"/>
-                <a:cs typeface="Overpass" pitchFamily="34" charset="-120"/>
+                <a:latin typeface="Red Hat Display" pitchFamily="34" charset="0"/>
+                <a:ea typeface="Red Hat Display" pitchFamily="34" charset="-122"/>
+                <a:cs typeface="Red Hat Display" pitchFamily="34" charset="-120"/>
               </a:rPr>
               <a:t>Messaging the Async Way</a:t>
             </a:r>
@@ -7740,9 +7740,9 @@
                 <a:solidFill>
                   <a:srgbClr val="EE0000"/>
                 </a:solidFill>
-                <a:latin typeface="Overpass" pitchFamily="34" charset="0"/>
-                <a:ea typeface="Overpass" pitchFamily="34" charset="-122"/>
-                <a:cs typeface="Overpass" pitchFamily="34" charset="-120"/>
+                <a:latin typeface="Red Hat Display" pitchFamily="34" charset="0"/>
+                <a:ea typeface="Red Hat Display" pitchFamily="34" charset="-122"/>
+                <a:cs typeface="Red Hat Display" pitchFamily="34" charset="-120"/>
               </a:rPr>
               <a:t>MESSAGING · THE AIOKAFKA PRODUCER</a:t>
             </a:r>
@@ -7779,9 +7779,9 @@
                 <a:solidFill>
                   <a:srgbClr val="151515"/>
                 </a:solidFill>
-                <a:latin typeface="Overpass" pitchFamily="34" charset="0"/>
-                <a:ea typeface="Overpass" pitchFamily="34" charset="-122"/>
-                <a:cs typeface="Overpass" pitchFamily="34" charset="-120"/>
+                <a:latin typeface="Red Hat Display" pitchFamily="34" charset="0"/>
+                <a:ea typeface="Red Hat Display" pitchFamily="34" charset="-122"/>
+                <a:cs typeface="Red Hat Display" pitchFamily="34" charset="-120"/>
               </a:rPr>
               <a:t>An async producer publishes the registry-aware envelope</a:t>
             </a:r>
@@ -8376,9 +8376,9 @@
                 <a:solidFill>
                   <a:srgbClr val="EE0000"/>
                 </a:solidFill>
-                <a:latin typeface="Overpass" pitchFamily="34" charset="0"/>
-                <a:ea typeface="Overpass" pitchFamily="34" charset="-122"/>
-                <a:cs typeface="Overpass" pitchFamily="34" charset="-120"/>
+                <a:latin typeface="Red Hat Display" pitchFamily="34" charset="0"/>
+                <a:ea typeface="Red Hat Display" pitchFamily="34" charset="-122"/>
+                <a:cs typeface="Red Hat Display" pitchFamily="34" charset="-120"/>
               </a:rPr>
               <a:t>MESSAGING · THE AIOKAFKA CONSUMER</a:t>
             </a:r>
@@ -8415,9 +8415,9 @@
                 <a:solidFill>
                   <a:srgbClr val="151515"/>
                 </a:solidFill>
-                <a:latin typeface="Overpass" pitchFamily="34" charset="0"/>
-                <a:ea typeface="Overpass" pitchFamily="34" charset="-122"/>
-                <a:cs typeface="Overpass" pitchFamily="34" charset="-120"/>
+                <a:latin typeface="Red Hat Display" pitchFamily="34" charset="0"/>
+                <a:ea typeface="Red Hat Display" pitchFamily="34" charset="-122"/>
+                <a:cs typeface="Red Hat Display" pitchFamily="34" charset="-120"/>
               </a:rPr>
               <a:t>An async consumer reacts to the choreographed event</a:t>
             </a:r>
@@ -9084,9 +9084,9 @@
                 <a:solidFill>
                   <a:srgbClr val="EE0000"/>
                 </a:solidFill>
-                <a:latin typeface="Overpass" pitchFamily="34" charset="0"/>
-                <a:ea typeface="Overpass" pitchFamily="34" charset="-122"/>
-                <a:cs typeface="Overpass" pitchFamily="34" charset="-120"/>
+                <a:latin typeface="Red Hat Display" pitchFamily="34" charset="0"/>
+                <a:ea typeface="Red Hat Display" pitchFamily="34" charset="-122"/>
+                <a:cs typeface="Red Hat Display" pitchFamily="34" charset="-120"/>
               </a:rPr>
               <a:t>MESSAGING · THE RELAY AS AN ASYNCIO TASK</a:t>
             </a:r>
@@ -9123,9 +9123,9 @@
                 <a:solidFill>
                   <a:srgbClr val="151515"/>
                 </a:solidFill>
-                <a:latin typeface="Overpass" pitchFamily="34" charset="0"/>
-                <a:ea typeface="Overpass" pitchFamily="34" charset="-122"/>
-                <a:cs typeface="Overpass" pitchFamily="34" charset="-120"/>
+                <a:latin typeface="Red Hat Display" pitchFamily="34" charset="0"/>
+                <a:ea typeface="Red Hat Display" pitchFamily="34" charset="-122"/>
+                <a:cs typeface="Red Hat Display" pitchFamily="34" charset="-120"/>
               </a:rPr>
               <a:t>The outbox relay runs as a background asyncio task</a:t>
             </a:r>
@@ -9774,9 +9774,9 @@
                 <a:solidFill>
                   <a:srgbClr val="EE0000"/>
                 </a:solidFill>
-                <a:latin typeface="Overpass" pitchFamily="34" charset="0"/>
-                <a:ea typeface="Overpass" pitchFamily="34" charset="-122"/>
-                <a:cs typeface="Overpass" pitchFamily="34" charset="-120"/>
+                <a:latin typeface="Red Hat Display" pitchFamily="34" charset="0"/>
+                <a:ea typeface="Red Hat Display" pitchFamily="34" charset="-122"/>
+                <a:cs typeface="Red Hat Display" pitchFamily="34" charset="-120"/>
               </a:rPr>
               <a:t>201-FASTAPI · THE ASYNC DEEP DIVE</a:t>
             </a:r>
@@ -9813,9 +9813,9 @@
                 <a:solidFill>
                   <a:srgbClr val="151515"/>
                 </a:solidFill>
-                <a:latin typeface="Overpass" pitchFamily="34" charset="0"/>
-                <a:ea typeface="Overpass" pitchFamily="34" charset="-122"/>
-                <a:cs typeface="Overpass" pitchFamily="34" charset="-120"/>
+                <a:latin typeface="Red Hat Display" pitchFamily="34" charset="0"/>
+                <a:ea typeface="Red Hat Display" pitchFamily="34" charset="-122"/>
+                <a:cs typeface="Red Hat Display" pitchFamily="34" charset="-120"/>
               </a:rPr>
               <a:t>The stack underneath every pattern in the 201</a:t>
             </a:r>
@@ -10128,9 +10128,9 @@
                 <a:solidFill>
                   <a:srgbClr val="EE0000"/>
                 </a:solidFill>
-                <a:latin typeface="Overpass" pitchFamily="34" charset="0"/>
-                <a:ea typeface="Overpass" pitchFamily="34" charset="-122"/>
-                <a:cs typeface="Overpass" pitchFamily="34" charset="-120"/>
+                <a:latin typeface="Red Hat Display" pitchFamily="34" charset="0"/>
+                <a:ea typeface="Red Hat Display" pitchFamily="34" charset="-122"/>
+                <a:cs typeface="Red Hat Display" pitchFamily="34" charset="-120"/>
               </a:rPr>
               <a:t>MESSAGING · IDEMPOTENT DEDUPE</a:t>
             </a:r>
@@ -10167,9 +10167,9 @@
                 <a:solidFill>
                   <a:srgbClr val="151515"/>
                 </a:solidFill>
-                <a:latin typeface="Overpass" pitchFamily="34" charset="0"/>
-                <a:ea typeface="Overpass" pitchFamily="34" charset="-122"/>
-                <a:cs typeface="Overpass" pitchFamily="34" charset="-120"/>
+                <a:latin typeface="Red Hat Display" pitchFamily="34" charset="0"/>
+                <a:ea typeface="Red Hat Display" pitchFamily="34" charset="-122"/>
+                <a:cs typeface="Red Hat Display" pitchFamily="34" charset="-120"/>
               </a:rPr>
               <a:t>A redelivered message must not double-apply</a:t>
             </a:r>
@@ -10356,9 +10356,9 @@
                 <a:solidFill>
                   <a:srgbClr val="EE0000"/>
                 </a:solidFill>
-                <a:latin typeface="Overpass" pitchFamily="34" charset="0"/>
-                <a:ea typeface="Overpass" pitchFamily="34" charset="-122"/>
-                <a:cs typeface="Overpass" pitchFamily="34" charset="-120"/>
+                <a:latin typeface="Red Hat Display" pitchFamily="34" charset="0"/>
+                <a:ea typeface="Red Hat Display" pitchFamily="34" charset="-122"/>
+                <a:cs typeface="Red Hat Display" pitchFamily="34" charset="-120"/>
               </a:rPr>
               <a:t>MESSAGING · COMPENSATION AS A CONSUMER</a:t>
             </a:r>
@@ -10395,9 +10395,9 @@
                 <a:solidFill>
                   <a:srgbClr val="151515"/>
                 </a:solidFill>
-                <a:latin typeface="Overpass" pitchFamily="34" charset="0"/>
-                <a:ea typeface="Overpass" pitchFamily="34" charset="-122"/>
-                <a:cs typeface="Overpass" pitchFamily="34" charset="-120"/>
+                <a:latin typeface="Red Hat Display" pitchFamily="34" charset="0"/>
+                <a:ea typeface="Red Hat Display" pitchFamily="34" charset="-122"/>
+                <a:cs typeface="Red Hat Display" pitchFamily="34" charset="-120"/>
               </a:rPr>
               <a:t>A compensating action is just another async consumer</a:t>
             </a:r>
@@ -10584,9 +10584,9 @@
                 <a:solidFill>
                   <a:srgbClr val="EE0000"/>
                 </a:solidFill>
-                <a:latin typeface="Overpass" pitchFamily="34" charset="0"/>
-                <a:ea typeface="Overpass" pitchFamily="34" charset="-122"/>
-                <a:cs typeface="Overpass" pitchFamily="34" charset="-120"/>
+                <a:latin typeface="Red Hat Display" pitchFamily="34" charset="0"/>
+                <a:ea typeface="Red Hat Display" pitchFamily="34" charset="-122"/>
+                <a:cs typeface="Red Hat Display" pitchFamily="34" charset="-120"/>
               </a:rPr>
               <a:t>MESSAGING · THE gRPC.AIO CONTRACT</a:t>
             </a:r>
@@ -10623,9 +10623,9 @@
                 <a:solidFill>
                   <a:srgbClr val="151515"/>
                 </a:solidFill>
-                <a:latin typeface="Overpass" pitchFamily="34" charset="0"/>
-                <a:ea typeface="Overpass" pitchFamily="34" charset="-122"/>
-                <a:cs typeface="Overpass" pitchFamily="34" charset="-120"/>
+                <a:latin typeface="Red Hat Display" pitchFamily="34" charset="0"/>
+                <a:ea typeface="Red Hat Display" pitchFamily="34" charset="-122"/>
+                <a:cs typeface="Red Hat Display" pitchFamily="34" charset="-120"/>
               </a:rPr>
               <a:t>Inventory's protobuf contract, seen from the async client</a:t>
             </a:r>
@@ -10812,9 +10812,9 @@
                 <a:solidFill>
                   <a:srgbClr val="EE0000"/>
                 </a:solidFill>
-                <a:latin typeface="Overpass" pitchFamily="34" charset="0"/>
-                <a:ea typeface="Overpass" pitchFamily="34" charset="-122"/>
-                <a:cs typeface="Overpass" pitchFamily="34" charset="-120"/>
+                <a:latin typeface="Red Hat Display" pitchFamily="34" charset="0"/>
+                <a:ea typeface="Red Hat Display" pitchFamily="34" charset="-122"/>
+                <a:cs typeface="Red Hat Display" pitchFamily="34" charset="-120"/>
               </a:rPr>
               <a:t>MESSAGING · THE gRPC.AIO SERVER</a:t>
             </a:r>
@@ -10851,9 +10851,9 @@
                 <a:solidFill>
                   <a:srgbClr val="151515"/>
                 </a:solidFill>
-                <a:latin typeface="Overpass" pitchFamily="34" charset="0"/>
-                <a:ea typeface="Overpass" pitchFamily="34" charset="-122"/>
-                <a:cs typeface="Overpass" pitchFamily="34" charset="-120"/>
+                <a:latin typeface="Red Hat Display" pitchFamily="34" charset="0"/>
+                <a:ea typeface="Red Hat Display" pitchFamily="34" charset="-122"/>
+                <a:cs typeface="Red Hat Display" pitchFamily="34" charset="-120"/>
               </a:rPr>
               <a:t>An async gRPC server behind the same FastAPI chassis</a:t>
             </a:r>
@@ -11376,9 +11376,9 @@
                 <a:solidFill>
                   <a:srgbClr val="EE0000"/>
                 </a:solidFill>
-                <a:latin typeface="Overpass" pitchFamily="34" charset="0"/>
-                <a:ea typeface="Overpass" pitchFamily="34" charset="-122"/>
-                <a:cs typeface="Overpass" pitchFamily="34" charset="-120"/>
+                <a:latin typeface="Red Hat Display" pitchFamily="34" charset="0"/>
+                <a:ea typeface="Red Hat Display" pitchFamily="34" charset="-122"/>
+                <a:cs typeface="Red Hat Display" pitchFamily="34" charset="-120"/>
               </a:rPr>
               <a:t>MESSAGING · THE REGISTRY ENVELOPE</a:t>
             </a:r>
@@ -11415,9 +11415,9 @@
                 <a:solidFill>
                   <a:srgbClr val="151515"/>
                 </a:solidFill>
-                <a:latin typeface="Overpass" pitchFamily="34" charset="0"/>
-                <a:ea typeface="Overpass" pitchFamily="34" charset="-122"/>
-                <a:cs typeface="Overpass" pitchFamily="34" charset="-120"/>
+                <a:latin typeface="Red Hat Display" pitchFamily="34" charset="0"/>
+                <a:ea typeface="Red Hat Display" pitchFamily="34" charset="-122"/>
+                <a:cs typeface="Red Hat Display" pitchFamily="34" charset="-120"/>
               </a:rPr>
               <a:t>Avro, wrapped for safe schema evolution</a:t>
             </a:r>
@@ -11572,9 +11572,9 @@
                 <a:solidFill>
                   <a:srgbClr val="FFFFFF"/>
                 </a:solidFill>
-                <a:latin typeface="Overpass" pitchFamily="34" charset="0"/>
-                <a:ea typeface="Overpass" pitchFamily="34" charset="-122"/>
-                <a:cs typeface="Overpass" pitchFamily="34" charset="-120"/>
+                <a:latin typeface="Red Hat Display" pitchFamily="34" charset="0"/>
+                <a:ea typeface="Red Hat Display" pitchFamily="34" charset="-122"/>
+                <a:cs typeface="Red Hat Display" pitchFamily="34" charset="-120"/>
               </a:rPr>
               <a:t>D</a:t>
             </a:r>
@@ -11611,9 +11611,9 @@
                 <a:solidFill>
                   <a:srgbClr val="FFFFFF"/>
                 </a:solidFill>
-                <a:latin typeface="Overpass" pitchFamily="34" charset="0"/>
-                <a:ea typeface="Overpass" pitchFamily="34" charset="-122"/>
-                <a:cs typeface="Overpass" pitchFamily="34" charset="-120"/>
+                <a:latin typeface="Red Hat Display" pitchFamily="34" charset="0"/>
+                <a:ea typeface="Red Hat Display" pitchFamily="34" charset="-122"/>
+                <a:cs typeface="Red Hat Display" pitchFamily="34" charset="-120"/>
               </a:rPr>
               <a:t>The Chassis as Convention, plus OTel</a:t>
             </a:r>
@@ -11801,9 +11801,9 @@
                 <a:solidFill>
                   <a:srgbClr val="EE0000"/>
                 </a:solidFill>
-                <a:latin typeface="Overpass" pitchFamily="34" charset="0"/>
-                <a:ea typeface="Overpass" pitchFamily="34" charset="-122"/>
-                <a:cs typeface="Overpass" pitchFamily="34" charset="-120"/>
+                <a:latin typeface="Red Hat Display" pitchFamily="34" charset="0"/>
+                <a:ea typeface="Red Hat Display" pitchFamily="34" charset="-122"/>
+                <a:cs typeface="Red Hat Display" pitchFamily="34" charset="-120"/>
               </a:rPr>
               <a:t>CHASSIS · CONFIG, LOGGING, HEALTH</a:t>
             </a:r>
@@ -11840,9 +11840,9 @@
                 <a:solidFill>
                   <a:srgbClr val="151515"/>
                 </a:solidFill>
-                <a:latin typeface="Overpass" pitchFamily="34" charset="0"/>
-                <a:ea typeface="Overpass" pitchFamily="34" charset="-122"/>
-                <a:cs typeface="Overpass" pitchFamily="34" charset="-120"/>
+                <a:latin typeface="Red Hat Display" pitchFamily="34" charset="0"/>
+                <a:ea typeface="Red Hat Display" pitchFamily="34" charset="-122"/>
+                <a:cs typeface="Red Hat Display" pitchFamily="34" charset="-120"/>
               </a:rPr>
               <a:t>The same shape, repeated as a convention across services</a:t>
             </a:r>
@@ -12401,9 +12401,9 @@
                 <a:solidFill>
                   <a:srgbClr val="EE0000"/>
                 </a:solidFill>
-                <a:latin typeface="Overpass" pitchFamily="34" charset="0"/>
-                <a:ea typeface="Overpass" pitchFamily="34" charset="-122"/>
-                <a:cs typeface="Overpass" pitchFamily="34" charset="-120"/>
+                <a:latin typeface="Red Hat Display" pitchFamily="34" charset="0"/>
+                <a:ea typeface="Red Hat Display" pitchFamily="34" charset="-122"/>
+                <a:cs typeface="Red Hat Display" pitchFamily="34" charset="-120"/>
               </a:rPr>
               <a:t>CHASSIS · ERRORS &amp; RESILIENCE AS CONVENTION</a:t>
             </a:r>
@@ -12440,9 +12440,9 @@
                 <a:solidFill>
                   <a:srgbClr val="151515"/>
                 </a:solidFill>
-                <a:latin typeface="Overpass" pitchFamily="34" charset="0"/>
-                <a:ea typeface="Overpass" pitchFamily="34" charset="-122"/>
-                <a:cs typeface="Overpass" pitchFamily="34" charset="-120"/>
+                <a:latin typeface="Red Hat Display" pitchFamily="34" charset="0"/>
+                <a:ea typeface="Red Hat Display" pitchFamily="34" charset="-122"/>
+                <a:cs typeface="Red Hat Display" pitchFamily="34" charset="-120"/>
               </a:rPr>
               <a:t>A typed error hierarchy, and the one retry this system has</a:t>
             </a:r>
@@ -13073,9 +13073,9 @@
                 <a:solidFill>
                   <a:srgbClr val="EE0000"/>
                 </a:solidFill>
-                <a:latin typeface="Overpass" pitchFamily="34" charset="0"/>
-                <a:ea typeface="Overpass" pitchFamily="34" charset="-122"/>
-                <a:cs typeface="Overpass" pitchFamily="34" charset="-120"/>
+                <a:latin typeface="Red Hat Display" pitchFamily="34" charset="0"/>
+                <a:ea typeface="Red Hat Display" pitchFamily="34" charset="-122"/>
+                <a:cs typeface="Red Hat Display" pitchFamily="34" charset="-120"/>
               </a:rPr>
               <a:t>CHASSIS · ANATOMY</a:t>
             </a:r>
@@ -13112,9 +13112,9 @@
                 <a:solidFill>
                   <a:srgbClr val="151515"/>
                 </a:solidFill>
-                <a:latin typeface="Overpass" pitchFamily="34" charset="0"/>
-                <a:ea typeface="Overpass" pitchFamily="34" charset="-122"/>
-                <a:cs typeface="Overpass" pitchFamily="34" charset="-120"/>
+                <a:latin typeface="Red Hat Display" pitchFamily="34" charset="0"/>
+                <a:ea typeface="Red Hat Display" pitchFamily="34" charset="-122"/>
+                <a:cs typeface="Red Hat Display" pitchFamily="34" charset="-120"/>
               </a:rPr>
               <a:t>DI wiring and the shape every service shares</a:t>
             </a:r>
@@ -13301,9 +13301,9 @@
                 <a:solidFill>
                   <a:srgbClr val="EE0000"/>
                 </a:solidFill>
-                <a:latin typeface="Overpass" pitchFamily="34" charset="0"/>
-                <a:ea typeface="Overpass" pitchFamily="34" charset="-122"/>
-                <a:cs typeface="Overpass" pitchFamily="34" charset="-120"/>
+                <a:latin typeface="Red Hat Display" pitchFamily="34" charset="0"/>
+                <a:ea typeface="Red Hat Display" pitchFamily="34" charset="-122"/>
+                <a:cs typeface="Red Hat Display" pitchFamily="34" charset="-120"/>
               </a:rPr>
               <a:t>CHASSIS · RESILIENCE TOPOLOGY</a:t>
             </a:r>
@@ -13340,9 +13340,9 @@
                 <a:solidFill>
                   <a:srgbClr val="151515"/>
                 </a:solidFill>
-                <a:latin typeface="Overpass" pitchFamily="34" charset="0"/>
-                <a:ea typeface="Overpass" pitchFamily="34" charset="-122"/>
-                <a:cs typeface="Overpass" pitchFamily="34" charset="-120"/>
+                <a:latin typeface="Red Hat Display" pitchFamily="34" charset="0"/>
+                <a:ea typeface="Red Hat Display" pitchFamily="34" charset="-122"/>
+                <a:cs typeface="Red Hat Display" pitchFamily="34" charset="-120"/>
               </a:rPr>
               <a:t>What already runs, what's new, and what's still named, not built</a:t>
             </a:r>
@@ -13406,7 +13406,7 @@
                 <a:ea typeface="Red Hat Text" pitchFamily="34" charset="-122"/>
                 <a:cs typeface="Red Hat Text" pitchFamily="34" charset="-120"/>
               </a:rPr>
-              <a:t>Four mechanisms this system already depends on, one new mechanism this chapter adds, and two patterns named as deferred, with the reason for each.</a:t>
+              <a:t>Four mechanisms this system already depends on, one new mechanism added here, and two patterns named as deferred, with the reason for each.</a:t>
             </a:r>
             <a:endParaRPr lang="en-US" sz="1300" dirty="0"/>
           </a:p>
@@ -13497,9 +13497,9 @@
                 <a:solidFill>
                   <a:srgbClr val="FFFFFF"/>
                 </a:solidFill>
-                <a:latin typeface="Overpass" pitchFamily="34" charset="0"/>
-                <a:ea typeface="Overpass" pitchFamily="34" charset="-122"/>
-                <a:cs typeface="Overpass" pitchFamily="34" charset="-120"/>
+                <a:latin typeface="Red Hat Display" pitchFamily="34" charset="0"/>
+                <a:ea typeface="Red Hat Display" pitchFamily="34" charset="-122"/>
+                <a:cs typeface="Red Hat Display" pitchFamily="34" charset="-120"/>
               </a:rPr>
               <a:t>A</a:t>
             </a:r>
@@ -13536,9 +13536,9 @@
                 <a:solidFill>
                   <a:srgbClr val="FFFFFF"/>
                 </a:solidFill>
-                <a:latin typeface="Overpass" pitchFamily="34" charset="0"/>
-                <a:ea typeface="Overpass" pitchFamily="34" charset="-122"/>
-                <a:cs typeface="Overpass" pitchFamily="34" charset="-120"/>
+                <a:latin typeface="Red Hat Display" pitchFamily="34" charset="0"/>
+                <a:ea typeface="Red Hat Display" pitchFamily="34" charset="-122"/>
+                <a:cs typeface="Red Hat Display" pitchFamily="34" charset="-120"/>
               </a:rPr>
               <a:t>The Async Foundation</a:t>
             </a:r>
@@ -13726,9 +13726,9 @@
                 <a:solidFill>
                   <a:srgbClr val="EE0000"/>
                 </a:solidFill>
-                <a:latin typeface="Overpass" pitchFamily="34" charset="0"/>
-                <a:ea typeface="Overpass" pitchFamily="34" charset="-122"/>
-                <a:cs typeface="Overpass" pitchFamily="34" charset="-120"/>
+                <a:latin typeface="Red Hat Display" pitchFamily="34" charset="0"/>
+                <a:ea typeface="Red Hat Display" pitchFamily="34" charset="-122"/>
+                <a:cs typeface="Red Hat Display" pitchFamily="34" charset="-120"/>
               </a:rPr>
               <a:t>CHASSIS · OTEL, ZERO-CODE ON THREE SERVICES</a:t>
             </a:r>
@@ -13765,9 +13765,9 @@
                 <a:solidFill>
                   <a:srgbClr val="151515"/>
                 </a:solidFill>
-                <a:latin typeface="Overpass" pitchFamily="34" charset="0"/>
-                <a:ea typeface="Overpass" pitchFamily="34" charset="-122"/>
-                <a:cs typeface="Overpass" pitchFamily="34" charset="-120"/>
+                <a:latin typeface="Red Hat Display" pitchFamily="34" charset="0"/>
+                <a:ea typeface="Red Hat Display" pitchFamily="34" charset="-122"/>
+                <a:cs typeface="Red Hat Display" pitchFamily="34" charset="-120"/>
               </a:rPr>
               <a:t>opentelemetry-distro auto-instruments; no manual spans, by choice</a:t>
             </a:r>
@@ -13954,9 +13954,9 @@
                 <a:solidFill>
                   <a:srgbClr val="EE0000"/>
                 </a:solidFill>
-                <a:latin typeface="Overpass" pitchFamily="34" charset="0"/>
-                <a:ea typeface="Overpass" pitchFamily="34" charset="-122"/>
-                <a:cs typeface="Overpass" pitchFamily="34" charset="-120"/>
+                <a:latin typeface="Red Hat Display" pitchFamily="34" charset="0"/>
+                <a:ea typeface="Red Hat Display" pitchFamily="34" charset="-122"/>
+                <a:cs typeface="Red Hat Display" pitchFamily="34" charset="-120"/>
               </a:rPr>
               <a:t>CHASSIS · THE SCORECARD</a:t>
             </a:r>
@@ -13993,9 +13993,9 @@
                 <a:solidFill>
                   <a:srgbClr val="151515"/>
                 </a:solidFill>
-                <a:latin typeface="Overpass" pitchFamily="34" charset="0"/>
-                <a:ea typeface="Overpass" pitchFamily="34" charset="-122"/>
-                <a:cs typeface="Overpass" pitchFamily="34" charset="-120"/>
+                <a:latin typeface="Red Hat Display" pitchFamily="34" charset="0"/>
+                <a:ea typeface="Red Hat Display" pitchFamily="34" charset="-122"/>
+                <a:cs typeface="Red Hat Display" pitchFamily="34" charset="-120"/>
               </a:rPr>
               <a:t>Which chassis capabilities each service actually adopted</a:t>
             </a:r>
@@ -14150,9 +14150,9 @@
                 <a:solidFill>
                   <a:srgbClr val="FFFFFF"/>
                 </a:solidFill>
-                <a:latin typeface="Overpass" pitchFamily="34" charset="0"/>
-                <a:ea typeface="Overpass" pitchFamily="34" charset="-122"/>
-                <a:cs typeface="Overpass" pitchFamily="34" charset="-120"/>
+                <a:latin typeface="Red Hat Display" pitchFamily="34" charset="0"/>
+                <a:ea typeface="Red Hat Display" pitchFamily="34" charset="-122"/>
+                <a:cs typeface="Red Hat Display" pitchFamily="34" charset="-120"/>
               </a:rPr>
               <a:t>E</a:t>
             </a:r>
@@ -14189,9 +14189,9 @@
                 <a:solidFill>
                   <a:srgbClr val="FFFFFF"/>
                 </a:solidFill>
-                <a:latin typeface="Overpass" pitchFamily="34" charset="0"/>
-                <a:ea typeface="Overpass" pitchFamily="34" charset="-122"/>
-                <a:cs typeface="Overpass" pitchFamily="34" charset="-120"/>
+                <a:latin typeface="Red Hat Display" pitchFamily="34" charset="0"/>
+                <a:ea typeface="Red Hat Display" pitchFamily="34" charset="-122"/>
+                <a:cs typeface="Red Hat Display" pitchFamily="34" charset="-120"/>
               </a:rPr>
               <a:t>Together</a:t>
             </a:r>
@@ -14379,9 +14379,9 @@
                 <a:solidFill>
                   <a:srgbClr val="EE0000"/>
                 </a:solidFill>
-                <a:latin typeface="Overpass" pitchFamily="34" charset="0"/>
-                <a:ea typeface="Overpass" pitchFamily="34" charset="-122"/>
-                <a:cs typeface="Overpass" pitchFamily="34" charset="-120"/>
+                <a:latin typeface="Red Hat Display" pitchFamily="34" charset="0"/>
+                <a:ea typeface="Red Hat Display" pitchFamily="34" charset="-122"/>
+                <a:cs typeface="Red Hat Display" pitchFamily="34" charset="-120"/>
               </a:rPr>
               <a:t>TOGETHER · THE ORCHESTRATED PATH</a:t>
             </a:r>
@@ -14418,9 +14418,9 @@
                 <a:solidFill>
                   <a:srgbClr val="151515"/>
                 </a:solidFill>
-                <a:latin typeface="Overpass" pitchFamily="34" charset="0"/>
-                <a:ea typeface="Overpass" pitchFamily="34" charset="-122"/>
-                <a:cs typeface="Overpass" pitchFamily="34" charset="-120"/>
+                <a:latin typeface="Red Hat Display" pitchFamily="34" charset="0"/>
+                <a:ea typeface="Red Hat Display" pitchFamily="34" charset="-122"/>
+                <a:cs typeface="Red Hat Display" pitchFamily="34" charset="-120"/>
               </a:rPr>
               <a:t>Checkout to shipped, one async path at a time</a:t>
             </a:r>
@@ -14607,9 +14607,9 @@
                 <a:solidFill>
                   <a:srgbClr val="EE0000"/>
                 </a:solidFill>
-                <a:latin typeface="Overpass" pitchFamily="34" charset="0"/>
-                <a:ea typeface="Overpass" pitchFamily="34" charset="-122"/>
-                <a:cs typeface="Overpass" pitchFamily="34" charset="-120"/>
+                <a:latin typeface="Red Hat Display" pitchFamily="34" charset="0"/>
+                <a:ea typeface="Red Hat Display" pitchFamily="34" charset="-122"/>
+                <a:cs typeface="Red Hat Display" pitchFamily="34" charset="-120"/>
               </a:rPr>
               <a:t>TOGETHER · THE CHOREOGRAPHED PATH</a:t>
             </a:r>
@@ -14646,9 +14646,9 @@
                 <a:solidFill>
                   <a:srgbClr val="151515"/>
                 </a:solidFill>
-                <a:latin typeface="Overpass" pitchFamily="34" charset="0"/>
-                <a:ea typeface="Overpass" pitchFamily="34" charset="-122"/>
-                <a:cs typeface="Overpass" pitchFamily="34" charset="-120"/>
+                <a:latin typeface="Red Hat Display" pitchFamily="34" charset="0"/>
+                <a:ea typeface="Red Hat Display" pitchFamily="34" charset="-122"/>
+                <a:cs typeface="Red Hat Display" pitchFamily="34" charset="-120"/>
               </a:rPr>
               <a:t>The same checkout, reacting instead of conducting</a:t>
             </a:r>
@@ -14835,9 +14835,9 @@
                 <a:solidFill>
                   <a:srgbClr val="EE0000"/>
                 </a:solidFill>
-                <a:latin typeface="Overpass" pitchFamily="34" charset="0"/>
-                <a:ea typeface="Overpass" pitchFamily="34" charset="-122"/>
-                <a:cs typeface="Overpass" pitchFamily="34" charset="-120"/>
+                <a:latin typeface="Red Hat Display" pitchFamily="34" charset="0"/>
+                <a:ea typeface="Red Hat Display" pitchFamily="34" charset="-122"/>
+                <a:cs typeface="Red Hat Display" pitchFamily="34" charset="-120"/>
               </a:rPr>
               <a:t>TOGETHER · CQRS, ASYNC</a:t>
             </a:r>
@@ -14874,9 +14874,9 @@
                 <a:solidFill>
                   <a:srgbClr val="151515"/>
                 </a:solidFill>
-                <a:latin typeface="Overpass" pitchFamily="34" charset="0"/>
-                <a:ea typeface="Overpass" pitchFamily="34" charset="-122"/>
-                <a:cs typeface="Overpass" pitchFamily="34" charset="-120"/>
+                <a:latin typeface="Red Hat Display" pitchFamily="34" charset="0"/>
+                <a:ea typeface="Red Hat Display" pitchFamily="34" charset="-122"/>
+                <a:cs typeface="Red Hat Display" pitchFamily="34" charset="-120"/>
               </a:rPr>
               <a:t>The write path and the read projection, both async</a:t>
             </a:r>
@@ -15063,9 +15063,9 @@
                 <a:solidFill>
                   <a:srgbClr val="EE0000"/>
                 </a:solidFill>
-                <a:latin typeface="Overpass" pitchFamily="34" charset="0"/>
-                <a:ea typeface="Overpass" pitchFamily="34" charset="-122"/>
-                <a:cs typeface="Overpass" pitchFamily="34" charset="-120"/>
+                <a:latin typeface="Red Hat Display" pitchFamily="34" charset="0"/>
+                <a:ea typeface="Red Hat Display" pitchFamily="34" charset="-122"/>
+                <a:cs typeface="Red Hat Display" pitchFamily="34" charset="-120"/>
               </a:rPr>
               <a:t>TOGETHER · CRASH-RESUME</a:t>
             </a:r>
@@ -15102,9 +15102,9 @@
                 <a:solidFill>
                   <a:srgbClr val="151515"/>
                 </a:solidFill>
-                <a:latin typeface="Overpass" pitchFamily="34" charset="0"/>
-                <a:ea typeface="Overpass" pitchFamily="34" charset="-122"/>
-                <a:cs typeface="Overpass" pitchFamily="34" charset="-120"/>
+                <a:latin typeface="Red Hat Display" pitchFamily="34" charset="0"/>
+                <a:ea typeface="Red Hat Display" pitchFamily="34" charset="-122"/>
+                <a:cs typeface="Red Hat Display" pitchFamily="34" charset="-120"/>
               </a:rPr>
               <a:t>Kill the process mid-saga; it resumes from the outbox</a:t>
             </a:r>
@@ -15291,9 +15291,9 @@
                 <a:solidFill>
                   <a:srgbClr val="EE0000"/>
                 </a:solidFill>
-                <a:latin typeface="Overpass" pitchFamily="34" charset="0"/>
-                <a:ea typeface="Overpass" pitchFamily="34" charset="-122"/>
-                <a:cs typeface="Overpass" pitchFamily="34" charset="-120"/>
+                <a:latin typeface="Red Hat Display" pitchFamily="34" charset="0"/>
+                <a:ea typeface="Red Hat Display" pitchFamily="34" charset="-122"/>
+                <a:cs typeface="Red Hat Display" pitchFamily="34" charset="-120"/>
               </a:rPr>
               <a:t>TOGETHER · THE EVENT-DRIVEN PATH</a:t>
             </a:r>
@@ -15330,9 +15330,9 @@
                 <a:solidFill>
                   <a:srgbClr val="151515"/>
                 </a:solidFill>
-                <a:latin typeface="Overpass" pitchFamily="34" charset="0"/>
-                <a:ea typeface="Overpass" pitchFamily="34" charset="-122"/>
-                <a:cs typeface="Overpass" pitchFamily="34" charset="-120"/>
+                <a:latin typeface="Red Hat Display" pitchFamily="34" charset="0"/>
+                <a:ea typeface="Red Hat Display" pitchFamily="34" charset="-122"/>
+                <a:cs typeface="Red Hat Display" pitchFamily="34" charset="-120"/>
               </a:rPr>
               <a:t>Notification reacts to the same event stream</a:t>
             </a:r>
@@ -15487,9 +15487,9 @@
                 <a:solidFill>
                   <a:srgbClr val="FFFFFF"/>
                 </a:solidFill>
-                <a:latin typeface="Overpass" pitchFamily="34" charset="0"/>
-                <a:ea typeface="Overpass" pitchFamily="34" charset="-122"/>
-                <a:cs typeface="Overpass" pitchFamily="34" charset="-120"/>
+                <a:latin typeface="Red Hat Display" pitchFamily="34" charset="0"/>
+                <a:ea typeface="Red Hat Display" pitchFamily="34" charset="-122"/>
+                <a:cs typeface="Red Hat Display" pitchFamily="34" charset="-120"/>
               </a:rPr>
               <a:t>F</a:t>
             </a:r>
@@ -15526,9 +15526,9 @@
                 <a:solidFill>
                   <a:srgbClr val="FFFFFF"/>
                 </a:solidFill>
-                <a:latin typeface="Overpass" pitchFamily="34" charset="0"/>
-                <a:ea typeface="Overpass" pitchFamily="34" charset="-122"/>
-                <a:cs typeface="Overpass" pitchFamily="34" charset="-120"/>
+                <a:latin typeface="Red Hat Display" pitchFamily="34" charset="0"/>
+                <a:ea typeface="Red Hat Display" pitchFamily="34" charset="-122"/>
+                <a:cs typeface="Red Hat Display" pitchFamily="34" charset="-120"/>
               </a:rPr>
               <a:t>Appendix: Packaging &amp; Testing</a:t>
             </a:r>
@@ -15716,9 +15716,9 @@
                 <a:solidFill>
                   <a:srgbClr val="EE0000"/>
                 </a:solidFill>
-                <a:latin typeface="Overpass" pitchFamily="34" charset="0"/>
-                <a:ea typeface="Overpass" pitchFamily="34" charset="-122"/>
-                <a:cs typeface="Overpass" pitchFamily="34" charset="-120"/>
+                <a:latin typeface="Red Hat Display" pitchFamily="34" charset="0"/>
+                <a:ea typeface="Red Hat Display" pitchFamily="34" charset="-122"/>
+                <a:cs typeface="Red Hat Display" pitchFamily="34" charset="-120"/>
               </a:rPr>
               <a:t>APPENDIX · PACKAGING</a:t>
             </a:r>
@@ -15755,9 +15755,9 @@
                 <a:solidFill>
                   <a:srgbClr val="151515"/>
                 </a:solidFill>
-                <a:latin typeface="Overpass" pitchFamily="34" charset="0"/>
-                <a:ea typeface="Overpass" pitchFamily="34" charset="-122"/>
-                <a:cs typeface="Overpass" pitchFamily="34" charset="-120"/>
+                <a:latin typeface="Red Hat Display" pitchFamily="34" charset="0"/>
+                <a:ea typeface="Red Hat Display" pitchFamily="34" charset="-122"/>
+                <a:cs typeface="Red Hat Display" pitchFamily="34" charset="-120"/>
               </a:rPr>
               <a:t>uv-managed dependencies, built on UBI10</a:t>
             </a:r>
@@ -16316,9 +16316,9 @@
                 <a:solidFill>
                   <a:srgbClr val="EE0000"/>
                 </a:solidFill>
-                <a:latin typeface="Overpass" pitchFamily="34" charset="0"/>
-                <a:ea typeface="Overpass" pitchFamily="34" charset="-122"/>
-                <a:cs typeface="Overpass" pitchFamily="34" charset="-120"/>
+                <a:latin typeface="Red Hat Display" pitchFamily="34" charset="0"/>
+                <a:ea typeface="Red Hat Display" pitchFamily="34" charset="-122"/>
+                <a:cs typeface="Red Hat Display" pitchFamily="34" charset="-120"/>
               </a:rPr>
               <a:t>ASYNC FOUNDATION · THE ASYNC SESSION</a:t>
             </a:r>
@@ -16355,9 +16355,9 @@
                 <a:solidFill>
                   <a:srgbClr val="151515"/>
                 </a:solidFill>
-                <a:latin typeface="Overpass" pitchFamily="34" charset="0"/>
-                <a:ea typeface="Overpass" pitchFamily="34" charset="-122"/>
-                <a:cs typeface="Overpass" pitchFamily="34" charset="-120"/>
+                <a:latin typeface="Red Hat Display" pitchFamily="34" charset="0"/>
+                <a:ea typeface="Red Hat Display" pitchFamily="34" charset="-122"/>
+                <a:cs typeface="Red Hat Display" pitchFamily="34" charset="-120"/>
               </a:rPr>
               <a:t>An async engine and session factory, once per service</a:t>
             </a:r>
@@ -16970,9 +16970,9 @@
                 <a:solidFill>
                   <a:srgbClr val="EE0000"/>
                 </a:solidFill>
-                <a:latin typeface="Overpass" pitchFamily="34" charset="0"/>
-                <a:ea typeface="Overpass" pitchFamily="34" charset="-122"/>
-                <a:cs typeface="Overpass" pitchFamily="34" charset="-120"/>
+                <a:latin typeface="Red Hat Display" pitchFamily="34" charset="0"/>
+                <a:ea typeface="Red Hat Display" pitchFamily="34" charset="-122"/>
+                <a:cs typeface="Red Hat Display" pitchFamily="34" charset="-120"/>
               </a:rPr>
               <a:t>APPENDIX · TESTING</a:t>
             </a:r>
@@ -17009,9 +17009,9 @@
                 <a:solidFill>
                   <a:srgbClr val="151515"/>
                 </a:solidFill>
-                <a:latin typeface="Overpass" pitchFamily="34" charset="0"/>
-                <a:ea typeface="Overpass" pitchFamily="34" charset="-122"/>
-                <a:cs typeface="Overpass" pitchFamily="34" charset="-120"/>
+                <a:latin typeface="Red Hat Display" pitchFamily="34" charset="0"/>
+                <a:ea typeface="Red Hat Display" pitchFamily="34" charset="-122"/>
+                <a:cs typeface="Red Hat Display" pitchFamily="34" charset="-120"/>
               </a:rPr>
               <a:t>pytest + Testcontainers exercise the real async stack</a:t>
             </a:r>
@@ -17534,9 +17534,9 @@
                 <a:solidFill>
                   <a:srgbClr val="EE0000"/>
                 </a:solidFill>
-                <a:latin typeface="Overpass" pitchFamily="34" charset="0"/>
-                <a:ea typeface="Overpass" pitchFamily="34" charset="-122"/>
-                <a:cs typeface="Overpass" pitchFamily="34" charset="-120"/>
+                <a:latin typeface="Red Hat Display" pitchFamily="34" charset="0"/>
+                <a:ea typeface="Red Hat Display" pitchFamily="34" charset="-122"/>
+                <a:cs typeface="Red Hat Display" pitchFamily="34" charset="-120"/>
               </a:rPr>
               <a:t>APPENDIX · REST CONTRACT CHECKS</a:t>
             </a:r>
@@ -17573,9 +17573,9 @@
                 <a:solidFill>
                   <a:srgbClr val="151515"/>
                 </a:solidFill>
-                <a:latin typeface="Overpass" pitchFamily="34" charset="0"/>
-                <a:ea typeface="Overpass" pitchFamily="34" charset="-122"/>
-                <a:cs typeface="Overpass" pitchFamily="34" charset="-120"/>
+                <a:latin typeface="Red Hat Display" pitchFamily="34" charset="0"/>
+                <a:ea typeface="Red Hat Display" pitchFamily="34" charset="-122"/>
+                <a:cs typeface="Red Hat Display" pitchFamily="34" charset="-120"/>
               </a:rPr>
               <a:t>Newman exercises the REST edges from outside the process</a:t>
             </a:r>
@@ -17794,9 +17794,9 @@
                 <a:solidFill>
                   <a:srgbClr val="EE0000"/>
                 </a:solidFill>
-                <a:latin typeface="Overpass" pitchFamily="34" charset="0"/>
-                <a:ea typeface="Overpass" pitchFamily="34" charset="-122"/>
-                <a:cs typeface="Overpass" pitchFamily="34" charset="-120"/>
+                <a:latin typeface="Red Hat Display" pitchFamily="34" charset="0"/>
+                <a:ea typeface="Red Hat Display" pitchFamily="34" charset="-122"/>
+                <a:cs typeface="Red Hat Display" pitchFamily="34" charset="-120"/>
               </a:rPr>
               <a:t>201-FASTAPI · CLOSE</a:t>
             </a:r>
@@ -17833,9 +17833,9 @@
                 <a:solidFill>
                   <a:srgbClr val="151515"/>
                 </a:solidFill>
-                <a:latin typeface="Overpass" pitchFamily="34" charset="0"/>
-                <a:ea typeface="Overpass" pitchFamily="34" charset="-122"/>
-                <a:cs typeface="Overpass" pitchFamily="34" charset="-120"/>
+                <a:latin typeface="Red Hat Display" pitchFamily="34" charset="0"/>
+                <a:ea typeface="Red Hat Display" pitchFamily="34" charset="-122"/>
+                <a:cs typeface="Red Hat Display" pitchFamily="34" charset="-120"/>
               </a:rPr>
               <a:t>The async stack, end to end</a:t>
             </a:r>
@@ -18054,9 +18054,9 @@
                 <a:solidFill>
                   <a:srgbClr val="EE0000"/>
                 </a:solidFill>
-                <a:latin typeface="Overpass" pitchFamily="34" charset="0"/>
-                <a:ea typeface="Overpass" pitchFamily="34" charset="-122"/>
-                <a:cs typeface="Overpass" pitchFamily="34" charset="-120"/>
+                <a:latin typeface="Red Hat Display" pitchFamily="34" charset="0"/>
+                <a:ea typeface="Red Hat Display" pitchFamily="34" charset="-122"/>
+                <a:cs typeface="Red Hat Display" pitchFamily="34" charset="-120"/>
               </a:rPr>
               <a:t>SCAN TO EXPLORE</a:t>
             </a:r>
@@ -18093,9 +18093,9 @@
                 <a:solidFill>
                   <a:srgbClr val="151515"/>
                 </a:solidFill>
-                <a:latin typeface="Overpass" pitchFamily="34" charset="0"/>
-                <a:ea typeface="Overpass" pitchFamily="34" charset="-122"/>
-                <a:cs typeface="Overpass" pitchFamily="34" charset="-120"/>
+                <a:latin typeface="Red Hat Display" pitchFamily="34" charset="0"/>
+                <a:ea typeface="Red Hat Display" pitchFamily="34" charset="-122"/>
+                <a:cs typeface="Red Hat Display" pitchFamily="34" charset="-120"/>
               </a:rPr>
               <a:t>Take it with you</a:t>
             </a:r>
@@ -18156,9 +18156,9 @@
                 <a:solidFill>
                   <a:srgbClr val="151515"/>
                 </a:solidFill>
-                <a:latin typeface="Overpass" pitchFamily="34" charset="0"/>
-                <a:ea typeface="Overpass" pitchFamily="34" charset="-122"/>
-                <a:cs typeface="Overpass" pitchFamily="34" charset="-120"/>
+                <a:latin typeface="Red Hat Display" pitchFamily="34" charset="0"/>
+                <a:ea typeface="Red Hat Display" pitchFamily="34" charset="-122"/>
+                <a:cs typeface="Red Hat Display" pitchFamily="34" charset="-120"/>
               </a:rPr>
               <a:t>The reference implementation</a:t>
             </a:r>
@@ -18297,9 +18297,9 @@
                 <a:solidFill>
                   <a:srgbClr val="151515"/>
                 </a:solidFill>
-                <a:latin typeface="Overpass" pitchFamily="34" charset="0"/>
-                <a:ea typeface="Overpass" pitchFamily="34" charset="-122"/>
-                <a:cs typeface="Overpass" pitchFamily="34" charset="-120"/>
+                <a:latin typeface="Red Hat Display" pitchFamily="34" charset="0"/>
+                <a:ea typeface="Red Hat Display" pitchFamily="34" charset="-122"/>
+                <a:cs typeface="Red Hat Display" pitchFamily="34" charset="-120"/>
               </a:rPr>
               <a:t>Workshops &amp; Tutorials</a:t>
             </a:r>
@@ -18502,9 +18502,9 @@
                 <a:solidFill>
                   <a:srgbClr val="EE0000"/>
                 </a:solidFill>
-                <a:latin typeface="Overpass" pitchFamily="34" charset="0"/>
-                <a:ea typeface="Overpass" pitchFamily="34" charset="-122"/>
-                <a:cs typeface="Overpass" pitchFamily="34" charset="-120"/>
+                <a:latin typeface="Red Hat Display" pitchFamily="34" charset="0"/>
+                <a:ea typeface="Red Hat Display" pitchFamily="34" charset="-122"/>
+                <a:cs typeface="Red Hat Display" pitchFamily="34" charset="-120"/>
               </a:rPr>
               <a:t>ASYNC FOUNDATION · THE UNIT OF WORK</a:t>
             </a:r>
@@ -18541,9 +18541,9 @@
                 <a:solidFill>
                   <a:srgbClr val="151515"/>
                 </a:solidFill>
-                <a:latin typeface="Overpass" pitchFamily="34" charset="0"/>
-                <a:ea typeface="Overpass" pitchFamily="34" charset="-122"/>
-                <a:cs typeface="Overpass" pitchFamily="34" charset="-120"/>
+                <a:latin typeface="Red Hat Display" pitchFamily="34" charset="0"/>
+                <a:ea typeface="Red Hat Display" pitchFamily="34" charset="-122"/>
+                <a:cs typeface="Red Hat Display" pitchFamily="34" charset="-120"/>
               </a:rPr>
               <a:t>The repository commits the business row and the outbox row together</a:t>
             </a:r>
@@ -19210,9 +19210,9 @@
                 <a:solidFill>
                   <a:srgbClr val="EE0000"/>
                 </a:solidFill>
-                <a:latin typeface="Overpass" pitchFamily="34" charset="0"/>
-                <a:ea typeface="Overpass" pitchFamily="34" charset="-122"/>
-                <a:cs typeface="Overpass" pitchFamily="34" charset="-120"/>
+                <a:latin typeface="Red Hat Display" pitchFamily="34" charset="0"/>
+                <a:ea typeface="Red Hat Display" pitchFamily="34" charset="-122"/>
+                <a:cs typeface="Red Hat Display" pitchFamily="34" charset="-120"/>
               </a:rPr>
               <a:t>ASYNC FOUNDATION · MIGRATIONS AS A CONTRACT</a:t>
             </a:r>
@@ -19249,9 +19249,9 @@
                 <a:solidFill>
                   <a:srgbClr val="151515"/>
                 </a:solidFill>
-                <a:latin typeface="Overpass" pitchFamily="34" charset="0"/>
-                <a:ea typeface="Overpass" pitchFamily="34" charset="-122"/>
-                <a:cs typeface="Overpass" pitchFamily="34" charset="-120"/>
+                <a:latin typeface="Red Hat Display" pitchFamily="34" charset="0"/>
+                <a:ea typeface="Red Hat Display" pitchFamily="34" charset="-122"/>
+                <a:cs typeface="Red Hat Display" pitchFamily="34" charset="-120"/>
               </a:rPr>
               <a:t>Alembic owns the schema, service by service</a:t>
             </a:r>
@@ -19864,9 +19864,9 @@
                 <a:solidFill>
                   <a:srgbClr val="EE0000"/>
                 </a:solidFill>
-                <a:latin typeface="Overpass" pitchFamily="34" charset="0"/>
-                <a:ea typeface="Overpass" pitchFamily="34" charset="-122"/>
-                <a:cs typeface="Overpass" pitchFamily="34" charset="-120"/>
+                <a:latin typeface="Red Hat Display" pitchFamily="34" charset="0"/>
+                <a:ea typeface="Red Hat Display" pitchFamily="34" charset="-122"/>
+                <a:cs typeface="Red Hat Display" pitchFamily="34" charset="-120"/>
               </a:rPr>
               <a:t>ASYNC FOUNDATION · THE OUTBOX WRITE</a:t>
             </a:r>
@@ -19903,9 +19903,9 @@
                 <a:solidFill>
                   <a:srgbClr val="151515"/>
                 </a:solidFill>
-                <a:latin typeface="Overpass" pitchFamily="34" charset="0"/>
-                <a:ea typeface="Overpass" pitchFamily="34" charset="-122"/>
-                <a:cs typeface="Overpass" pitchFamily="34" charset="-120"/>
+                <a:latin typeface="Red Hat Display" pitchFamily="34" charset="0"/>
+                <a:ea typeface="Red Hat Display" pitchFamily="34" charset="-122"/>
+                <a:cs typeface="Red Hat Display" pitchFamily="34" charset="-120"/>
               </a:rPr>
               <a:t>Write the outbox row in the same transaction</a:t>
             </a:r>
@@ -20092,9 +20092,9 @@
                 <a:solidFill>
                   <a:srgbClr val="EE0000"/>
                 </a:solidFill>
-                <a:latin typeface="Overpass" pitchFamily="34" charset="0"/>
-                <a:ea typeface="Overpass" pitchFamily="34" charset="-122"/>
-                <a:cs typeface="Overpass" pitchFamily="34" charset="-120"/>
+                <a:latin typeface="Red Hat Display" pitchFamily="34" charset="0"/>
+                <a:ea typeface="Red Hat Display" pitchFamily="34" charset="-122"/>
+                <a:cs typeface="Red Hat Display" pitchFamily="34" charset="-120"/>
               </a:rPr>
               <a:t>ASYNC FOUNDATION · THE RELAY, AT LEAST ONCE</a:t>
             </a:r>
@@ -20131,9 +20131,9 @@
                 <a:solidFill>
                   <a:srgbClr val="151515"/>
                 </a:solidFill>
-                <a:latin typeface="Overpass" pitchFamily="34" charset="0"/>
-                <a:ea typeface="Overpass" pitchFamily="34" charset="-122"/>
-                <a:cs typeface="Overpass" pitchFamily="34" charset="-120"/>
+                <a:latin typeface="Red Hat Display" pitchFamily="34" charset="0"/>
+                <a:ea typeface="Red Hat Display" pitchFamily="34" charset="-122"/>
+                <a:cs typeface="Red Hat Display" pitchFamily="34" charset="-120"/>
               </a:rPr>
               <a:t>The relay is what makes a crash survivable</a:t>
             </a:r>
@@ -20197,7 +20197,7 @@
                 <a:ea typeface="Red Hat Text" pitchFamily="34" charset="-122"/>
                 <a:cs typeface="Red Hat Text" pitchFamily="34" charset="-120"/>
               </a:rPr>
-              <a:t>The relay loop publishes at least once; the consumer side (section C) dedupes.</a:t>
+              <a:t>The relay loop publishes at least once; the idempotent consumer side dedupes.</a:t>
             </a:r>
             <a:endParaRPr lang="en-US" sz="1300" dirty="0"/>
           </a:p>
@@ -20288,9 +20288,9 @@
                 <a:solidFill>
                   <a:srgbClr val="FFFFFF"/>
                 </a:solidFill>
-                <a:latin typeface="Overpass" pitchFamily="34" charset="0"/>
-                <a:ea typeface="Overpass" pitchFamily="34" charset="-122"/>
-                <a:cs typeface="Overpass" pitchFamily="34" charset="-120"/>
+                <a:latin typeface="Red Hat Display" pitchFamily="34" charset="0"/>
+                <a:ea typeface="Red Hat Display" pitchFamily="34" charset="-122"/>
+                <a:cs typeface="Red Hat Display" pitchFamily="34" charset="-120"/>
               </a:rPr>
               <a:t>B</a:t>
             </a:r>
@@ -20327,9 +20327,9 @@
                 <a:solidFill>
                   <a:srgbClr val="FFFFFF"/>
                 </a:solidFill>
-                <a:latin typeface="Overpass" pitchFamily="34" charset="0"/>
-                <a:ea typeface="Overpass" pitchFamily="34" charset="-122"/>
-                <a:cs typeface="Overpass" pitchFamily="34" charset="-120"/>
+                <a:latin typeface="Red Hat Display" pitchFamily="34" charset="0"/>
+                <a:ea typeface="Red Hat Display" pitchFamily="34" charset="-122"/>
+                <a:cs typeface="Red Hat Display" pitchFamily="34" charset="-120"/>
               </a:rPr>
               <a:t>Pydantic v2 at the Edges</a:t>
             </a:r>
